--- a/Inclui-Digital.pptx
+++ b/Inclui-Digital.pptx
@@ -1384,12 +1384,20 @@
               <a:buNone/>
             </a:pPr>
             <a:r>
+              <a:rPr lang="en-US" sz="1100" dirty="0" err="1">
+                <a:solidFill>
+                  <a:srgbClr val="9AA0B4"/>
+                </a:solidFill>
+              </a:rPr>
+              <a:t>Inclusão</a:t>
+            </a:r>
+            <a:r>
               <a:rPr lang="en-US" sz="1100" dirty="0">
                 <a:solidFill>
                   <a:srgbClr val="9AA0B4"/>
                 </a:solidFill>
               </a:rPr>
-              <a:t>Inclusão Social</a:t>
+              <a:t> Social</a:t>
             </a:r>
             <a:endParaRPr lang="en-US" sz="1100" dirty="0"/>
           </a:p>
@@ -1574,6 +1582,14 @@
             </a:pPr>
             <a:r>
               <a:rPr lang="en-US" sz="1100" dirty="0">
+                <a:solidFill>
+                  <a:srgbClr val="9AA0B4"/>
+                </a:solidFill>
+              </a:rPr>
+              <a:t>100% </a:t>
+            </a:r>
+            <a:r>
+              <a:rPr lang="en-US" sz="1100" dirty="0" err="1">
                 <a:solidFill>
                   <a:srgbClr val="9AA0B4"/>
                 </a:solidFill>
@@ -1805,7 +1821,7 @@
               <a:buNone/>
             </a:pPr>
             <a:r>
-              <a:rPr lang="en-US" sz="1500" dirty="0">
+              <a:rPr lang="en-US" sz="1600" dirty="0">
                 <a:solidFill>
                   <a:srgbClr val="9AA0B4"/>
                 </a:solidFill>
@@ -1815,7 +1831,7 @@
               </a:rPr>
               <a:t>Criar uma plataforma web gratuita que auxilie na inclusão social e digital de pessoas com deficiência e comunidades em situação de vulnerabilidade, oferecendo cursos, comunidade e recursos de acessibilidade.</a:t>
             </a:r>
-            <a:endParaRPr lang="en-US" sz="1500" dirty="0"/>
+            <a:endParaRPr lang="en-US" sz="1600" dirty="0"/>
           </a:p>
         </p:txBody>
       </p:sp>
@@ -1855,6 +1871,36 @@
           </a:p>
         </p:txBody>
       </p:sp>
+      <p:pic>
+        <p:nvPicPr>
+          <p:cNvPr id="11" name="Imagem 10">
+            <a:extLst>
+              <a:ext uri="{FF2B5EF4-FFF2-40B4-BE49-F238E27FC236}">
+                <a16:creationId xmlns:a16="http://schemas.microsoft.com/office/drawing/2014/main" id="{0F2D5E95-E4EC-4A41-97A7-EF817D5C1315}"/>
+              </a:ext>
+            </a:extLst>
+          </p:cNvPr>
+          <p:cNvPicPr>
+            <a:picLocks noChangeAspect="1"/>
+          </p:cNvPicPr>
+          <p:nvPr/>
+        </p:nvPicPr>
+        <p:blipFill>
+          <a:blip r:embed="rId3"/>
+          <a:stretch>
+            <a:fillRect/>
+          </a:stretch>
+        </p:blipFill>
+        <p:spPr>
+          <a:xfrm>
+            <a:off x="2294118" y="2845182"/>
+            <a:ext cx="4508616" cy="2092578"/>
+          </a:xfrm>
+          <a:prstGeom prst="rect">
+            <a:avLst/>
+          </a:prstGeom>
+        </p:spPr>
+      </p:pic>
     </p:spTree>
   </p:cSld>
   <p:clrMapOvr>
@@ -2816,7 +2862,7 @@
                   <a:srgbClr val="9AA0B4"/>
                 </a:solidFill>
               </a:rPr>
-              <a:t>  1</a:t>
+              <a:t> 1</a:t>
             </a:r>
             <a:endParaRPr lang="en-US" sz="1000" dirty="0"/>
           </a:p>
@@ -2926,7 +2972,7 @@
                   <a:srgbClr val="9AA0B4"/>
                 </a:solidFill>
               </a:rPr>
-              <a:t>  2</a:t>
+              <a:t> 2</a:t>
             </a:r>
             <a:endParaRPr lang="en-US" sz="1000" dirty="0"/>
           </a:p>
@@ -3036,7 +3082,7 @@
                   <a:srgbClr val="9AA0B4"/>
                 </a:solidFill>
               </a:rPr>
-              <a:t>  3</a:t>
+              <a:t> 3</a:t>
             </a:r>
             <a:endParaRPr lang="en-US" sz="1000" dirty="0"/>
           </a:p>
@@ -3146,7 +3192,7 @@
                   <a:srgbClr val="9AA0B4"/>
                 </a:solidFill>
               </a:rPr>
-              <a:t>  4</a:t>
+              <a:t> 4</a:t>
             </a:r>
             <a:endParaRPr lang="en-US" sz="1000" dirty="0"/>
           </a:p>
@@ -3395,7 +3441,7 @@
         </p:nvSpPr>
         <p:spPr>
           <a:xfrm>
-            <a:off x="457200" y="1897380"/>
+            <a:off x="397764" y="1895094"/>
             <a:ext cx="4023360" cy="1005840"/>
           </a:xfrm>
           <a:prstGeom prst="roundRect">
@@ -3458,7 +3504,7 @@
         </p:nvSpPr>
         <p:spPr>
           <a:xfrm>
-            <a:off x="457200" y="2281428"/>
+            <a:off x="457200" y="2245304"/>
             <a:ext cx="4023360" cy="457200"/>
           </a:xfrm>
           <a:prstGeom prst="rect">
@@ -3475,7 +3521,7 @@
               <a:buNone/>
             </a:pPr>
             <a:r>
-              <a:rPr lang="en-US" sz="1300" b="1" dirty="0">
+              <a:rPr lang="en-US" sz="1300" b="1" dirty="0" err="1">
                 <a:solidFill>
                   <a:srgbClr val="E8EAF0"/>
                 </a:solidFill>
@@ -3483,7 +3529,95 @@
                 <a:ea typeface="Calibri" pitchFamily="34" charset="-122"/>
                 <a:cs typeface="Calibri" pitchFamily="34" charset="-120"/>
               </a:rPr>
-              <a:t>Pessoas com deficiência visual, auditiva ou motora</a:t>
+              <a:t>Comunidades</a:t>
+            </a:r>
+            <a:r>
+              <a:rPr lang="en-US" sz="1300" b="1" dirty="0">
+                <a:solidFill>
+                  <a:srgbClr val="E8EAF0"/>
+                </a:solidFill>
+                <a:latin typeface="Calibri" pitchFamily="34" charset="0"/>
+                <a:ea typeface="Calibri" pitchFamily="34" charset="-122"/>
+                <a:cs typeface="Calibri" pitchFamily="34" charset="-120"/>
+              </a:rPr>
+              <a:t> </a:t>
+            </a:r>
+            <a:r>
+              <a:rPr lang="en-US" sz="1300" b="1" dirty="0" err="1">
+                <a:solidFill>
+                  <a:srgbClr val="E8EAF0"/>
+                </a:solidFill>
+                <a:latin typeface="Calibri" pitchFamily="34" charset="0"/>
+                <a:ea typeface="Calibri" pitchFamily="34" charset="-122"/>
+                <a:cs typeface="Calibri" pitchFamily="34" charset="-120"/>
+              </a:rPr>
+              <a:t>carentes</a:t>
+            </a:r>
+            <a:r>
+              <a:rPr lang="en-US" sz="1300" b="1" dirty="0">
+                <a:solidFill>
+                  <a:srgbClr val="E8EAF0"/>
+                </a:solidFill>
+                <a:latin typeface="Calibri" pitchFamily="34" charset="0"/>
+                <a:ea typeface="Calibri" pitchFamily="34" charset="-122"/>
+                <a:cs typeface="Calibri" pitchFamily="34" charset="-120"/>
+              </a:rPr>
+              <a:t> com </a:t>
+            </a:r>
+            <a:r>
+              <a:rPr lang="en-US" sz="1300" b="1" dirty="0" err="1">
+                <a:solidFill>
+                  <a:srgbClr val="E8EAF0"/>
+                </a:solidFill>
+                <a:latin typeface="Calibri" pitchFamily="34" charset="0"/>
+                <a:ea typeface="Calibri" pitchFamily="34" charset="-122"/>
+                <a:cs typeface="Calibri" pitchFamily="34" charset="-120"/>
+              </a:rPr>
+              <a:t>pouco</a:t>
+            </a:r>
+            <a:r>
+              <a:rPr lang="en-US" sz="1300" b="1" dirty="0">
+                <a:solidFill>
+                  <a:srgbClr val="E8EAF0"/>
+                </a:solidFill>
+                <a:latin typeface="Calibri" pitchFamily="34" charset="0"/>
+                <a:ea typeface="Calibri" pitchFamily="34" charset="-122"/>
+                <a:cs typeface="Calibri" pitchFamily="34" charset="-120"/>
+              </a:rPr>
+              <a:t> </a:t>
+            </a:r>
+            <a:r>
+              <a:rPr lang="en-US" sz="1300" b="1" dirty="0" err="1">
+                <a:solidFill>
+                  <a:srgbClr val="E8EAF0"/>
+                </a:solidFill>
+                <a:latin typeface="Calibri" pitchFamily="34" charset="0"/>
+                <a:ea typeface="Calibri" pitchFamily="34" charset="-122"/>
+                <a:cs typeface="Calibri" pitchFamily="34" charset="-120"/>
+              </a:rPr>
+              <a:t>acesso</a:t>
+            </a:r>
+            <a:r>
+              <a:rPr lang="en-US" sz="1300" b="1" dirty="0">
+                <a:solidFill>
+                  <a:srgbClr val="E8EAF0"/>
+                </a:solidFill>
+                <a:latin typeface="Calibri" pitchFamily="34" charset="0"/>
+                <a:ea typeface="Calibri" pitchFamily="34" charset="-122"/>
+                <a:cs typeface="Calibri" pitchFamily="34" charset="-120"/>
+              </a:rPr>
+              <a:t> à </a:t>
+            </a:r>
+            <a:r>
+              <a:rPr lang="en-US" sz="1300" b="1" dirty="0" err="1">
+                <a:solidFill>
+                  <a:srgbClr val="E8EAF0"/>
+                </a:solidFill>
+                <a:latin typeface="Calibri" pitchFamily="34" charset="0"/>
+                <a:ea typeface="Calibri" pitchFamily="34" charset="-122"/>
+                <a:cs typeface="Calibri" pitchFamily="34" charset="-120"/>
+              </a:rPr>
+              <a:t>tecnologia</a:t>
             </a:r>
             <a:endParaRPr lang="en-US" sz="1300" dirty="0"/>
           </a:p>
@@ -3573,11 +3707,9 @@
           <a:bodyPr wrap="square" lIns="0" tIns="0" rIns="0" bIns="0" rtlCol="0" anchor="ctr"/>
           <a:lstStyle/>
           <a:p>
-            <a:pPr marL="0" indent="0" algn="ctr">
-              <a:buNone/>
-            </a:pPr>
-            <a:r>
-              <a:rPr lang="en-US" sz="1300" b="1" dirty="0">
+            <a:pPr algn="ctr"/>
+            <a:r>
+              <a:rPr lang="en-US" sz="1300" b="1" dirty="0" err="1">
                 <a:solidFill>
                   <a:srgbClr val="E8EAF0"/>
                 </a:solidFill>
@@ -3585,9 +3717,104 @@
                 <a:ea typeface="Calibri" pitchFamily="34" charset="-122"/>
                 <a:cs typeface="Calibri" pitchFamily="34" charset="-120"/>
               </a:rPr>
-              <a:t>Comunidades carentes com pouco acesso à tecnologia</a:t>
-            </a:r>
-            <a:endParaRPr lang="en-US" sz="1300" dirty="0"/>
+              <a:t>Idosos</a:t>
+            </a:r>
+            <a:r>
+              <a:rPr lang="en-US" sz="1300" b="1" dirty="0">
+                <a:solidFill>
+                  <a:srgbClr val="E8EAF0"/>
+                </a:solidFill>
+                <a:latin typeface="Calibri" pitchFamily="34" charset="0"/>
+                <a:ea typeface="Calibri" pitchFamily="34" charset="-122"/>
+                <a:cs typeface="Calibri" pitchFamily="34" charset="-120"/>
+              </a:rPr>
+              <a:t> </a:t>
+            </a:r>
+            <a:r>
+              <a:rPr lang="en-US" sz="1300" b="1" dirty="0" err="1">
+                <a:solidFill>
+                  <a:srgbClr val="E8EAF0"/>
+                </a:solidFill>
+                <a:latin typeface="Calibri" pitchFamily="34" charset="0"/>
+                <a:ea typeface="Calibri" pitchFamily="34" charset="-122"/>
+                <a:cs typeface="Calibri" pitchFamily="34" charset="-120"/>
+              </a:rPr>
+              <a:t>aprendendo</a:t>
+            </a:r>
+            <a:r>
+              <a:rPr lang="en-US" sz="1300" b="1" dirty="0">
+                <a:solidFill>
+                  <a:srgbClr val="E8EAF0"/>
+                </a:solidFill>
+                <a:latin typeface="Calibri" pitchFamily="34" charset="0"/>
+                <a:ea typeface="Calibri" pitchFamily="34" charset="-122"/>
+                <a:cs typeface="Calibri" pitchFamily="34" charset="-120"/>
+              </a:rPr>
+              <a:t> </a:t>
+            </a:r>
+            <a:r>
+              <a:rPr lang="en-US" sz="1300" b="1" dirty="0" err="1">
+                <a:solidFill>
+                  <a:srgbClr val="E8EAF0"/>
+                </a:solidFill>
+                <a:latin typeface="Calibri" pitchFamily="34" charset="0"/>
+                <a:ea typeface="Calibri" pitchFamily="34" charset="-122"/>
+                <a:cs typeface="Calibri" pitchFamily="34" charset="-120"/>
+              </a:rPr>
+              <a:t>tecnologia</a:t>
+            </a:r>
+            <a:r>
+              <a:rPr lang="en-US" sz="1300" b="1" dirty="0">
+                <a:solidFill>
+                  <a:srgbClr val="E8EAF0"/>
+                </a:solidFill>
+                <a:latin typeface="Calibri" pitchFamily="34" charset="0"/>
+                <a:ea typeface="Calibri" pitchFamily="34" charset="-122"/>
+                <a:cs typeface="Calibri" pitchFamily="34" charset="-120"/>
+              </a:rPr>
+              <a:t> pela </a:t>
+            </a:r>
+            <a:r>
+              <a:rPr lang="en-US" sz="1300" b="1" dirty="0" err="1">
+                <a:solidFill>
+                  <a:srgbClr val="E8EAF0"/>
+                </a:solidFill>
+                <a:latin typeface="Calibri" pitchFamily="34" charset="0"/>
+                <a:ea typeface="Calibri" pitchFamily="34" charset="-122"/>
+                <a:cs typeface="Calibri" pitchFamily="34" charset="-120"/>
+              </a:rPr>
+              <a:t>primeira</a:t>
+            </a:r>
+            <a:r>
+              <a:rPr lang="en-US" sz="1300" b="1" dirty="0">
+                <a:solidFill>
+                  <a:srgbClr val="E8EAF0"/>
+                </a:solidFill>
+                <a:latin typeface="Calibri" pitchFamily="34" charset="0"/>
+                <a:ea typeface="Calibri" pitchFamily="34" charset="-122"/>
+                <a:cs typeface="Calibri" pitchFamily="34" charset="-120"/>
+              </a:rPr>
+              <a:t> </a:t>
+            </a:r>
+            <a:r>
+              <a:rPr lang="en-US" sz="1300" b="1" dirty="0" err="1">
+                <a:solidFill>
+                  <a:srgbClr val="E8EAF0"/>
+                </a:solidFill>
+                <a:latin typeface="Calibri" pitchFamily="34" charset="0"/>
+                <a:ea typeface="Calibri" pitchFamily="34" charset="-122"/>
+                <a:cs typeface="Calibri" pitchFamily="34" charset="-120"/>
+              </a:rPr>
+              <a:t>vez</a:t>
+            </a:r>
+            <a:endParaRPr lang="en-US" sz="1300" b="1" dirty="0">
+              <a:solidFill>
+                <a:srgbClr val="E8EAF0"/>
+              </a:solidFill>
+              <a:latin typeface="Calibri" pitchFamily="34" charset="0"/>
+              <a:ea typeface="Calibri" pitchFamily="34" charset="-122"/>
+              <a:cs typeface="Calibri" pitchFamily="34" charset="-120"/>
+            </a:endParaRPr>
           </a:p>
         </p:txBody>
       </p:sp>
@@ -3599,7 +3826,7 @@
         </p:nvSpPr>
         <p:spPr>
           <a:xfrm>
-            <a:off x="457200" y="3086100"/>
+            <a:off x="397764" y="3086100"/>
             <a:ext cx="4023360" cy="1005840"/>
           </a:xfrm>
           <a:prstGeom prst="roundRect">
@@ -3662,7 +3889,7 @@
         </p:nvSpPr>
         <p:spPr>
           <a:xfrm>
-            <a:off x="457200" y="3470148"/>
+            <a:off x="397764" y="3394911"/>
             <a:ext cx="4023360" cy="457200"/>
           </a:xfrm>
           <a:prstGeom prst="rect">
@@ -3679,7 +3906,7 @@
               <a:buNone/>
             </a:pPr>
             <a:r>
-              <a:rPr lang="en-US" sz="1300" b="1" dirty="0">
+              <a:rPr lang="en-US" sz="1300" b="1" dirty="0" err="1">
                 <a:solidFill>
                   <a:srgbClr val="E8EAF0"/>
                 </a:solidFill>
@@ -3687,7 +3914,84 @@
                 <a:ea typeface="Calibri" pitchFamily="34" charset="-122"/>
                 <a:cs typeface="Calibri" pitchFamily="34" charset="-120"/>
               </a:rPr>
-              <a:t>Idosos aprendendo tecnologia pela primeira vez</a:t>
+              <a:t>Pessoas</a:t>
+            </a:r>
+            <a:r>
+              <a:rPr lang="en-US" sz="1300" b="1" dirty="0">
+                <a:solidFill>
+                  <a:srgbClr val="E8EAF0"/>
+                </a:solidFill>
+                <a:latin typeface="Calibri" pitchFamily="34" charset="0"/>
+                <a:ea typeface="Calibri" pitchFamily="34" charset="-122"/>
+                <a:cs typeface="Calibri" pitchFamily="34" charset="-120"/>
+              </a:rPr>
+              <a:t> com </a:t>
+            </a:r>
+            <a:r>
+              <a:rPr lang="en-US" sz="1300" b="1" dirty="0" err="1">
+                <a:solidFill>
+                  <a:srgbClr val="E8EAF0"/>
+                </a:solidFill>
+                <a:latin typeface="Calibri" pitchFamily="34" charset="0"/>
+                <a:ea typeface="Calibri" pitchFamily="34" charset="-122"/>
+                <a:cs typeface="Calibri" pitchFamily="34" charset="-120"/>
+              </a:rPr>
+              <a:t>daltonismo</a:t>
+            </a:r>
+            <a:r>
+              <a:rPr lang="en-US" sz="1300" b="1" dirty="0">
+                <a:solidFill>
+                  <a:srgbClr val="E8EAF0"/>
+                </a:solidFill>
+                <a:latin typeface="Calibri" pitchFamily="34" charset="0"/>
+                <a:ea typeface="Calibri" pitchFamily="34" charset="-122"/>
+                <a:cs typeface="Calibri" pitchFamily="34" charset="-120"/>
+              </a:rPr>
+              <a:t> (</a:t>
+            </a:r>
+            <a:r>
+              <a:rPr lang="en-US" sz="1300" b="1" dirty="0" err="1">
+                <a:solidFill>
+                  <a:srgbClr val="E8EAF0"/>
+                </a:solidFill>
+                <a:latin typeface="Calibri" pitchFamily="34" charset="0"/>
+                <a:ea typeface="Calibri" pitchFamily="34" charset="-122"/>
+                <a:cs typeface="Calibri" pitchFamily="34" charset="-120"/>
+              </a:rPr>
+              <a:t>filtros</a:t>
+            </a:r>
+            <a:r>
+              <a:rPr lang="en-US" sz="1300" b="1" dirty="0">
+                <a:solidFill>
+                  <a:srgbClr val="E8EAF0"/>
+                </a:solidFill>
+                <a:latin typeface="Calibri" pitchFamily="34" charset="0"/>
+                <a:ea typeface="Calibri" pitchFamily="34" charset="-122"/>
+                <a:cs typeface="Calibri" pitchFamily="34" charset="-120"/>
+              </a:rPr>
+              <a:t> </a:t>
+            </a:r>
+            <a:r>
+              <a:rPr lang="en-US" sz="1300" b="1" dirty="0" err="1">
+                <a:solidFill>
+                  <a:srgbClr val="E8EAF0"/>
+                </a:solidFill>
+                <a:latin typeface="Calibri" pitchFamily="34" charset="0"/>
+                <a:ea typeface="Calibri" pitchFamily="34" charset="-122"/>
+                <a:cs typeface="Calibri" pitchFamily="34" charset="-120"/>
+              </a:rPr>
+              <a:t>dedicados</a:t>
+            </a:r>
+            <a:r>
+              <a:rPr lang="en-US" sz="1300" b="1" dirty="0">
+                <a:solidFill>
+                  <a:srgbClr val="E8EAF0"/>
+                </a:solidFill>
+                <a:latin typeface="Calibri" pitchFamily="34" charset="0"/>
+                <a:ea typeface="Calibri" pitchFamily="34" charset="-122"/>
+                <a:cs typeface="Calibri" pitchFamily="34" charset="-120"/>
+              </a:rPr>
+              <a:t>)</a:t>
             </a:r>
             <a:endParaRPr lang="en-US" sz="1300" dirty="0"/>
           </a:p>
@@ -3789,7 +4093,95 @@
                 <a:ea typeface="Calibri" pitchFamily="34" charset="-122"/>
                 <a:cs typeface="Calibri" pitchFamily="34" charset="-120"/>
               </a:rPr>
-              <a:t>Pessoas com daltonismo (filtros dedicados)</a:t>
+              <a:t>Entre outros </a:t>
+            </a:r>
+            <a:r>
+              <a:rPr lang="en-US" sz="1300" b="1" dirty="0" err="1">
+                <a:solidFill>
+                  <a:srgbClr val="E8EAF0"/>
+                </a:solidFill>
+                <a:latin typeface="Calibri" pitchFamily="34" charset="0"/>
+                <a:ea typeface="Calibri" pitchFamily="34" charset="-122"/>
+                <a:cs typeface="Calibri" pitchFamily="34" charset="-120"/>
+              </a:rPr>
+              <a:t>grupos</a:t>
+            </a:r>
+            <a:r>
+              <a:rPr lang="en-US" sz="1300" b="1" dirty="0">
+                <a:solidFill>
+                  <a:srgbClr val="E8EAF0"/>
+                </a:solidFill>
+                <a:latin typeface="Calibri" pitchFamily="34" charset="0"/>
+                <a:ea typeface="Calibri" pitchFamily="34" charset="-122"/>
+                <a:cs typeface="Calibri" pitchFamily="34" charset="-120"/>
+              </a:rPr>
+              <a:t> (</a:t>
+            </a:r>
+            <a:r>
+              <a:rPr lang="en-US" sz="1300" b="1" dirty="0" err="1">
+                <a:solidFill>
+                  <a:srgbClr val="E8EAF0"/>
+                </a:solidFill>
+                <a:latin typeface="Calibri" pitchFamily="34" charset="0"/>
+                <a:ea typeface="Calibri" pitchFamily="34" charset="-122"/>
+                <a:cs typeface="Calibri" pitchFamily="34" charset="-120"/>
+              </a:rPr>
+              <a:t>dificuldade</a:t>
+            </a:r>
+            <a:r>
+              <a:rPr lang="en-US" sz="1300" b="1" dirty="0">
+                <a:solidFill>
+                  <a:srgbClr val="E8EAF0"/>
+                </a:solidFill>
+                <a:latin typeface="Calibri" pitchFamily="34" charset="0"/>
+                <a:ea typeface="Calibri" pitchFamily="34" charset="-122"/>
+                <a:cs typeface="Calibri" pitchFamily="34" charset="-120"/>
+              </a:rPr>
+              <a:t> </a:t>
+            </a:r>
+            <a:r>
+              <a:rPr lang="en-US" sz="1300" b="1" dirty="0" err="1">
+                <a:solidFill>
+                  <a:srgbClr val="E8EAF0"/>
+                </a:solidFill>
+                <a:latin typeface="Calibri" pitchFamily="34" charset="0"/>
+                <a:ea typeface="Calibri" pitchFamily="34" charset="-122"/>
+                <a:cs typeface="Calibri" pitchFamily="34" charset="-120"/>
+              </a:rPr>
+              <a:t>motora</a:t>
+            </a:r>
+            <a:r>
+              <a:rPr lang="en-US" sz="1300" b="1" dirty="0">
+                <a:solidFill>
+                  <a:srgbClr val="E8EAF0"/>
+                </a:solidFill>
+                <a:latin typeface="Calibri" pitchFamily="34" charset="0"/>
+                <a:ea typeface="Calibri" pitchFamily="34" charset="-122"/>
+                <a:cs typeface="Calibri" pitchFamily="34" charset="-120"/>
+              </a:rPr>
+              <a:t>, auditive e </a:t>
+            </a:r>
+            <a:r>
+              <a:rPr lang="en-US" sz="1300" b="1" dirty="0" err="1">
+                <a:solidFill>
+                  <a:srgbClr val="E8EAF0"/>
+                </a:solidFill>
+                <a:latin typeface="Calibri" pitchFamily="34" charset="0"/>
+                <a:ea typeface="Calibri" pitchFamily="34" charset="-122"/>
+                <a:cs typeface="Calibri" pitchFamily="34" charset="-120"/>
+              </a:rPr>
+              <a:t>intelectual</a:t>
+            </a:r>
+            <a:r>
+              <a:rPr lang="en-US" sz="1300" b="1" dirty="0">
+                <a:solidFill>
+                  <a:srgbClr val="E8EAF0"/>
+                </a:solidFill>
+                <a:latin typeface="Calibri" pitchFamily="34" charset="0"/>
+                <a:ea typeface="Calibri" pitchFamily="34" charset="-122"/>
+                <a:cs typeface="Calibri" pitchFamily="34" charset="-120"/>
+              </a:rPr>
+              <a:t>)</a:t>
             </a:r>
             <a:endParaRPr lang="en-US" sz="1300" dirty="0"/>
           </a:p>
@@ -4087,7 +4479,51 @@
                 <a:ea typeface="Calibri" pitchFamily="34" charset="-122"/>
                 <a:cs typeface="Calibri" pitchFamily="34" charset="-120"/>
               </a:rPr>
-              <a:t>• Acesso gratuito ao conhecimento digital</a:t>
+              <a:t>• Acesso gratuito </a:t>
+            </a:r>
+            <a:r>
+              <a:rPr lang="en-US" sz="1300" dirty="0" err="1">
+                <a:solidFill>
+                  <a:srgbClr val="E8EAF0"/>
+                </a:solidFill>
+                <a:latin typeface="Calibri" pitchFamily="34" charset="0"/>
+                <a:ea typeface="Calibri" pitchFamily="34" charset="-122"/>
+                <a:cs typeface="Calibri" pitchFamily="34" charset="-120"/>
+              </a:rPr>
+              <a:t>ao</a:t>
+            </a:r>
+            <a:r>
+              <a:rPr lang="en-US" sz="1300" dirty="0">
+                <a:solidFill>
+                  <a:srgbClr val="E8EAF0"/>
+                </a:solidFill>
+                <a:latin typeface="Calibri" pitchFamily="34" charset="0"/>
+                <a:ea typeface="Calibri" pitchFamily="34" charset="-122"/>
+                <a:cs typeface="Calibri" pitchFamily="34" charset="-120"/>
+              </a:rPr>
+              <a:t> </a:t>
+            </a:r>
+            <a:r>
+              <a:rPr lang="en-US" sz="1300" dirty="0" err="1">
+                <a:solidFill>
+                  <a:srgbClr val="E8EAF0"/>
+                </a:solidFill>
+                <a:latin typeface="Calibri" pitchFamily="34" charset="0"/>
+                <a:ea typeface="Calibri" pitchFamily="34" charset="-122"/>
+                <a:cs typeface="Calibri" pitchFamily="34" charset="-120"/>
+              </a:rPr>
+              <a:t>conhecimento</a:t>
+            </a:r>
+            <a:r>
+              <a:rPr lang="en-US" sz="1300" dirty="0">
+                <a:solidFill>
+                  <a:srgbClr val="E8EAF0"/>
+                </a:solidFill>
+                <a:latin typeface="Calibri" pitchFamily="34" charset="0"/>
+                <a:ea typeface="Calibri" pitchFamily="34" charset="-122"/>
+                <a:cs typeface="Calibri" pitchFamily="34" charset="-120"/>
+              </a:rPr>
+              <a:t> digital</a:t>
             </a:r>
             <a:endParaRPr lang="en-US" sz="1300" dirty="0"/>
           </a:p>
@@ -4267,51 +4703,7 @@
                 <a:ea typeface="Calibri" pitchFamily="34" charset="-122"/>
                 <a:cs typeface="Calibri" pitchFamily="34" charset="-120"/>
               </a:rPr>
-              <a:t>• Sem app mobile (</a:t>
-            </a:r>
-            <a:r>
-              <a:rPr lang="en-US" sz="1300" dirty="0" err="1">
-                <a:solidFill>
-                  <a:srgbClr val="E8EAF0"/>
-                </a:solidFill>
-                <a:latin typeface="Calibri" pitchFamily="34" charset="0"/>
-                <a:ea typeface="Calibri" pitchFamily="34" charset="-122"/>
-                <a:cs typeface="Calibri" pitchFamily="34" charset="-120"/>
-              </a:rPr>
-              <a:t>por</a:t>
-            </a:r>
-            <a:r>
-              <a:rPr lang="en-US" sz="1300" dirty="0">
-                <a:solidFill>
-                  <a:srgbClr val="E8EAF0"/>
-                </a:solidFill>
-                <a:latin typeface="Calibri" pitchFamily="34" charset="0"/>
-                <a:ea typeface="Calibri" pitchFamily="34" charset="-122"/>
-                <a:cs typeface="Calibri" pitchFamily="34" charset="-120"/>
-              </a:rPr>
-              <a:t> </a:t>
-            </a:r>
-            <a:r>
-              <a:rPr lang="en-US" sz="1300" dirty="0" err="1">
-                <a:solidFill>
-                  <a:srgbClr val="E8EAF0"/>
-                </a:solidFill>
-                <a:latin typeface="Calibri" pitchFamily="34" charset="0"/>
-                <a:ea typeface="Calibri" pitchFamily="34" charset="-122"/>
-                <a:cs typeface="Calibri" pitchFamily="34" charset="-120"/>
-              </a:rPr>
-              <a:t>enquanto</a:t>
-            </a:r>
-            <a:r>
-              <a:rPr lang="en-US" sz="1300" dirty="0">
-                <a:solidFill>
-                  <a:srgbClr val="E8EAF0"/>
-                </a:solidFill>
-                <a:latin typeface="Calibri" pitchFamily="34" charset="0"/>
-                <a:ea typeface="Calibri" pitchFamily="34" charset="-122"/>
-                <a:cs typeface="Calibri" pitchFamily="34" charset="-120"/>
-              </a:rPr>
-              <a:t>)</a:t>
+              <a:t>• Sem app mobile</a:t>
             </a:r>
             <a:endParaRPr lang="en-US" sz="1300" dirty="0"/>
           </a:p>
@@ -4646,7 +5038,29 @@
                 <a:ea typeface="Trebuchet MS" pitchFamily="34" charset="-122"/>
                 <a:cs typeface="Trebuchet MS" pitchFamily="34" charset="-120"/>
               </a:rPr>
-              <a:t>a internet ainda esqueceu.</a:t>
+              <a:t>a internet </a:t>
+            </a:r>
+            <a:r>
+              <a:rPr lang="en-US" sz="2800" b="1" dirty="0" err="1">
+                <a:solidFill>
+                  <a:srgbClr val="E8EAF0"/>
+                </a:solidFill>
+                <a:latin typeface="Trebuchet MS" pitchFamily="34" charset="0"/>
+                <a:ea typeface="Trebuchet MS" pitchFamily="34" charset="-122"/>
+                <a:cs typeface="Trebuchet MS" pitchFamily="34" charset="-120"/>
+              </a:rPr>
+              <a:t>esqueceu</a:t>
+            </a:r>
+            <a:r>
+              <a:rPr lang="en-US" sz="2800" b="1" dirty="0">
+                <a:solidFill>
+                  <a:srgbClr val="E8EAF0"/>
+                </a:solidFill>
+                <a:latin typeface="Trebuchet MS" pitchFamily="34" charset="0"/>
+                <a:ea typeface="Trebuchet MS" pitchFamily="34" charset="-122"/>
+                <a:cs typeface="Trebuchet MS" pitchFamily="34" charset="-120"/>
+              </a:rPr>
+              <a:t>...</a:t>
             </a:r>
             <a:endParaRPr lang="en-US" sz="2800" dirty="0"/>
           </a:p>
